--- a/teaching/slides/day3_mergers_remedies_litigation.pptx
+++ b/teaching/slides/day3_mergers_remedies_litigation.pptx
@@ -9626,7 +9626,7 @@
               </a:spcAft>
             </a:pPr>
             <a:r>
-              <a:rPr sz="1900" b="0" i="0">
+              <a:rPr sz="1900" b="1" i="0">
                 <a:solidFill>
                   <a:srgbClr val="222222"/>
                 </a:solidFill>
